--- a/0023_studi_kasus1_materi_4_achmad_chilmi.pptx
+++ b/0023_studi_kasus1_materi_4_achmad_chilmi.pptx
@@ -10,6 +10,7 @@
     <p:sldId id="266" r:id="rId5"/>
     <p:sldId id="267" r:id="rId6"/>
     <p:sldId id="268" r:id="rId15"/>
+    <p:sldId id="269" r:id="rId16"/>
     <p:sldId id="258" r:id="rId7"/>
   </p:sldIdLst>
   <p:sldSz cx="18288000" cy="10287000"/>
@@ -3881,7 +3882,7 @@
                 </a:solidFill>
                 <a:latin typeface="Inter"/>
               </a:rPr>
-              <a:t>Algoritma CLARA &amp; PCA</a:t>
+              <a:t>Algoritma CLARA &amp; Reduksi PCA</a:t>
             </a:r>
           </a:p>
         </p:txBody>
@@ -3920,7 +3921,7 @@
               </a:defRPr>
             </a:pPr>
             <a:r>
-              <a:t>A. Implementasi Klastering Skala Besar</a:t>
+              <a:t>Mengapa CLARA? CLARA (Clustering Large Applications) dipilih karena merupakan modifikasi algoritma K-Medoids yang efisien untuk big data dengan metode penarikan sampel acak berulang.</a:t>
             </a:r>
           </a:p>
           <a:p>
@@ -3936,7 +3937,7 @@
               </a:defRPr>
             </a:pPr>
             <a:r>
-              <a:t>Mengapa CLARA? CLARA (Clustering Large Applications) merupakan varian K-Medoids yang efisien untuk big data, menggunakan sampling acak untuk meminimalkan beban memori.</a:t>
+              <a:t>K-Medoids Keunggulan: Lebih tangguh terhadap outliers dibandingkan K-Means karena representasi pusat kluster berupa data riil (medoids).</a:t>
             </a:r>
           </a:p>
           <a:p>
@@ -3952,7 +3953,7 @@
               </a:defRPr>
             </a:pPr>
             <a:r>
-              <a:t>Visualisasi PCA: Fitur RFM direduksi menjadi 2 dimensi utama untuk disajikan secara spasial, memperlihatkan batas kluster yang terpisah dengan jelas.</a:t>
+              <a:t>Reduksi Dimensi PCA: Menggunakan Principal Component Analysis (PCA) untuk mereduksi 3 fitur RFM menjadi 2 dimensi visual demi verifikasi pemisahan batas kluster.</a:t>
             </a:r>
           </a:p>
         </p:txBody>
@@ -4264,7 +4265,7 @@
                 </a:solidFill>
                 <a:latin typeface="Inter"/>
               </a:rPr>
-              <a:t>Karakteristik Profil Segmen</a:t>
+              <a:t>Karakteristik 4 Profil Segmen</a:t>
             </a:r>
           </a:p>
         </p:txBody>
@@ -4295,7 +4296,7 @@
               <a:spcAft>
                 <a:spcPts val="1200"/>
               </a:spcAft>
-              <a:defRPr sz="2600">
+              <a:defRPr sz="2400">
                 <a:solidFill>
                   <a:srgbClr val="403E3E"/>
                 </a:solidFill>
@@ -4303,15 +4304,15 @@
               </a:defRPr>
             </a:pPr>
             <a:r>
-              <a:t>A. Profiling &amp; Labeling Pelanggan (K=4)</a:t>
-            </a:r>
-          </a:p>
-          <a:p>
-            <a:pPr>
+              <a:t>Profiling Hasil K=4:</a:t>
+            </a:r>
+          </a:p>
+          <a:p>
+            <a:pPr lvl="1">
               <a:spcAft>
                 <a:spcPts val="1200"/>
               </a:spcAft>
-              <a:defRPr sz="2600">
+              <a:defRPr sz="2000">
                 <a:solidFill>
                   <a:srgbClr val="403E3E"/>
                 </a:solidFill>
@@ -4319,15 +4320,15 @@
               </a:defRPr>
             </a:pPr>
             <a:r>
-              <a:t>Kluster 0 - Lost Customers (Rasio Recency sangat lama, Frekuensi belanja rendah, Pengeluaran sangat murah).</a:t>
-            </a:r>
-          </a:p>
-          <a:p>
-            <a:pPr>
+              <a:t>- Kluster 0 - Lost Customers: Pelanggan lama tidak belanja, frekuensi rendah, nominal belanja sangat murah.</a:t>
+            </a:r>
+          </a:p>
+          <a:p>
+            <a:pPr lvl="1">
               <a:spcAft>
                 <a:spcPts val="1200"/>
               </a:spcAft>
-              <a:defRPr sz="2600">
+              <a:defRPr sz="2000">
                 <a:solidFill>
                   <a:srgbClr val="403E3E"/>
                 </a:solidFill>
@@ -4335,15 +4336,15 @@
               </a:defRPr>
             </a:pPr>
             <a:r>
-              <a:t>Kluster 1 - Loyal High-Spenders (Recency baru, Frekuensi sangat sering belanja, Nominal belanja besar - Segmen Premium).</a:t>
-            </a:r>
-          </a:p>
-          <a:p>
-            <a:pPr>
+              <a:t>- Kluster 1 - Loyal High-Spenders: Belanja baru-baru ini, sangat sering belanja, total belanjaan bernilai besar (Segmen Premium).</a:t>
+            </a:r>
+          </a:p>
+          <a:p>
+            <a:pPr lvl="1">
               <a:spcAft>
                 <a:spcPts val="1200"/>
               </a:spcAft>
-              <a:defRPr sz="2600">
+              <a:defRPr sz="2000">
                 <a:solidFill>
                   <a:srgbClr val="403E3E"/>
                 </a:solidFill>
@@ -4351,15 +4352,15 @@
               </a:defRPr>
             </a:pPr>
             <a:r>
-              <a:t>Kluster 2 - New/Recent Shoppers (Baru bertransaksi, Frekuensi rendah, Nominal belanja murah).</a:t>
-            </a:r>
-          </a:p>
-          <a:p>
-            <a:pPr>
+              <a:t>- Kluster 2 - New/Recent Shoppers: Baru bertransaksi akhir-akhir ini, frekuensi rendah, belanja nominal murah.</a:t>
+            </a:r>
+          </a:p>
+          <a:p>
+            <a:pPr lvl="1">
               <a:spcAft>
                 <a:spcPts val="1200"/>
               </a:spcAft>
-              <a:defRPr sz="2600">
+              <a:defRPr sz="2000">
                 <a:solidFill>
                   <a:srgbClr val="403E3E"/>
                 </a:solidFill>
@@ -4367,7 +4368,7 @@
               </a:defRPr>
             </a:pPr>
             <a:r>
-              <a:t>Kluster 3 - At-Risk High-Spenders (Dulu sering belanja nominal besar, namun sudah sangat lama tidak aktif belanja).</a:t>
+              <a:t>- Kluster 3 - At-Risk High-Spenders: Dulu sering belanja nominal besar, namun sekarang sudah sangat lama tidak aktif bertransaksi.</a:t>
             </a:r>
           </a:p>
         </p:txBody>
@@ -4679,7 +4680,7 @@
                 </a:solidFill>
                 <a:latin typeface="Inter"/>
               </a:rPr>
-              <a:t>Uji Kestabilan Segmentasi</a:t>
+              <a:t>Uji Stabilitas Segmen</a:t>
             </a:r>
           </a:p>
         </p:txBody>
@@ -4718,7 +4719,7 @@
               </a:defRPr>
             </a:pPr>
             <a:r>
-              <a:t>A. Uji Stabilitas dengan Jaccard Index</a:t>
+              <a:t>Pengujian Kestabilan: Menerapkan uji stabilitas segmentasi dengan menyuntikkan derau acak (noise 1%) ke dalam data masukan RFM.</a:t>
             </a:r>
           </a:p>
           <a:p>
@@ -4734,7 +4735,7 @@
               </a:defRPr>
             </a:pPr>
             <a:r>
-              <a:t>Metode Pengujian: Menambahkan noise acak (derau 1%) pada fitur RFM untuk melihat konsistensi keanggotaan kluster.</a:t>
+              <a:t>Hasil Uji Jaccard Index: Rata-rata nilai kemiripan segmen (Jaccard Score) mencapai 0.95+ pada seluruh kluster.</a:t>
             </a:r>
           </a:p>
           <a:p>
@@ -4750,23 +4751,7 @@
               </a:defRPr>
             </a:pPr>
             <a:r>
-              <a:t>Hasil Indeks Jaccard: Diperoleh skor rata-rata Jaccard 0.95+ pada seluruh kluster.</a:t>
-            </a:r>
-          </a:p>
-          <a:p>
-            <a:pPr>
-              <a:spcAft>
-                <a:spcPts val="1200"/>
-              </a:spcAft>
-              <a:defRPr sz="2800">
-                <a:solidFill>
-                  <a:srgbClr val="403E3E"/>
-                </a:solidFill>
-                <a:latin typeface="Inter"/>
-              </a:defRPr>
-            </a:pPr>
-            <a:r>
-              <a:t>Kesimpulan: Segmentasi model CLARA sangat stabil dan memiliki validitas tinggi, aman digunakan sebagai acuan jangka panjang.</a:t>
+              <a:t>Kesimpulan: Segmentasi model CLARA terbukti memiliki kestabilan yang sangat tinggi dan tidak rentan terhadap perubahan data kecil.</a:t>
             </a:r>
           </a:p>
         </p:txBody>
@@ -5063,7 +5048,7 @@
                 </a:solidFill>
                 <a:latin typeface="Inter"/>
               </a:rPr>
-              <a:t>Simulator &amp; Skenario Bisnis</a:t>
+              <a:t>Simulator Segmentasi Pelanggan</a:t>
             </a:r>
           </a:p>
         </p:txBody>
@@ -5102,7 +5087,7 @@
               </a:defRPr>
             </a:pPr>
             <a:r>
-              <a:t>A. Aplikasi Simulator &amp; Strategi Marketing</a:t>
+              <a:t>Implementasi Simulator: Fungsi interaktif predict_segment(recency, frequency, monetary) untuk mengklasifikasikan data pelanggan baru.</a:t>
             </a:r>
           </a:p>
           <a:p>
@@ -5118,7 +5103,7 @@
               </a:defRPr>
             </a:pPr>
             <a:r>
-              <a:t>Simulator: Fungsi predict_segment(r, f, m) untuk mengkategorikan pelanggan baru secara dinamis.</a:t>
+              <a:t>Contoh Eksekusi: Pelanggan baru dengan input (R=5 hari, F=10 kali, M=2000 BRL) langsung diidentifikasi secara otomatis ke dalam Kluster 1 (Loyal High-Spenders).</a:t>
             </a:r>
           </a:p>
           <a:p>
@@ -5134,55 +5119,7 @@
               </a:defRPr>
             </a:pPr>
             <a:r>
-              <a:t>Usulan Strategi Aksi Marketing:</a:t>
-            </a:r>
-          </a:p>
-          <a:p>
-            <a:pPr lvl="1">
-              <a:spcAft>
-                <a:spcPts val="1200"/>
-              </a:spcAft>
-              <a:defRPr sz="2200">
-                <a:solidFill>
-                  <a:srgbClr val="403E3E"/>
-                </a:solidFill>
-                <a:latin typeface="Inter"/>
-              </a:defRPr>
-            </a:pPr>
-            <a:r>
-              <a:t>- Loyal Customers -&gt; Berikan program VIP, poin loyalitas, early-access produk baru.</a:t>
-            </a:r>
-          </a:p>
-          <a:p>
-            <a:pPr lvl="1">
-              <a:spcAft>
-                <a:spcPts val="1200"/>
-              </a:spcAft>
-              <a:defRPr sz="2200">
-                <a:solidFill>
-                  <a:srgbClr val="403E3E"/>
-                </a:solidFill>
-                <a:latin typeface="Inter"/>
-              </a:defRPr>
-            </a:pPr>
-            <a:r>
-              <a:t>- At-Risk High-Spenders -&gt; Kirim email win-back dengan voucher diskon besar.</a:t>
-            </a:r>
-          </a:p>
-          <a:p>
-            <a:pPr lvl="1">
-              <a:spcAft>
-                <a:spcPts val="1200"/>
-              </a:spcAft>
-              <a:defRPr sz="2200">
-                <a:solidFill>
-                  <a:srgbClr val="403E3E"/>
-                </a:solidFill>
-                <a:latin typeface="Inter"/>
-              </a:defRPr>
-            </a:pPr>
-            <a:r>
-              <a:t>- New Shoppers -&gt; Tawarkan diskon pembelian kedua untuk meningkatkan retensi.</a:t>
+              <a:t>Nilai Bisnis: Membantu manajer CRM mengotomatisasi segmentasi pelanggan langsung dari dashboard pemasaran.</a:t>
             </a:r>
           </a:p>
         </p:txBody>
@@ -5196,6 +5133,406 @@
 </file>
 
 <file path=ppt/slides/slide6.xml><?xml version="1.0" encoding="utf-8"?>
+<p:sld xmlns:a="http://schemas.openxmlformats.org/drawingml/2006/main" xmlns:p="http://schemas.openxmlformats.org/presentationml/2006/main" xmlns:r="http://schemas.openxmlformats.org/officeDocument/2006/relationships">
+  <p:cSld>
+    <p:spTree>
+      <p:nvGrpSpPr>
+        <p:cNvPr id="1" name=""/>
+        <p:cNvGrpSpPr/>
+        <p:nvPr/>
+      </p:nvGrpSpPr>
+      <p:grpSpPr/>
+      <p:grpSp>
+        <p:nvGrpSpPr>
+          <p:cNvPr id="2" name="Group 2"/>
+          <p:cNvGrpSpPr/>
+          <p:nvPr/>
+        </p:nvGrpSpPr>
+        <p:grpSpPr>
+          <a:xfrm rot="5400000">
+            <a:off x="12432431" y="4605338"/>
+            <a:ext cx="10730064" cy="1076325"/>
+            <a:chOff x="0" y="0"/>
+            <a:chExt cx="3845413" cy="385731"/>
+          </a:xfrm>
+        </p:grpSpPr>
+        <p:sp>
+          <p:nvSpPr>
+            <p:cNvPr id="3" name="Freeform 3"/>
+            <p:cNvSpPr/>
+            <p:nvPr/>
+          </p:nvSpPr>
+          <p:spPr>
+            <a:xfrm>
+              <a:off x="0" y="0"/>
+              <a:ext cx="3845413" cy="385731"/>
+            </a:xfrm>
+            <a:custGeom>
+              <a:avLst/>
+              <a:gdLst/>
+              <a:ahLst/>
+              <a:cxnLst/>
+              <a:rect l="l" t="t" r="r" b="b"/>
+              <a:pathLst>
+                <a:path w="3845413" h="385731">
+                  <a:moveTo>
+                    <a:pt x="0" y="0"/>
+                  </a:moveTo>
+                  <a:lnTo>
+                    <a:pt x="3845413" y="0"/>
+                  </a:lnTo>
+                  <a:lnTo>
+                    <a:pt x="3845413" y="385731"/>
+                  </a:lnTo>
+                  <a:lnTo>
+                    <a:pt x="0" y="385731"/>
+                  </a:lnTo>
+                  <a:close/>
+                </a:path>
+              </a:pathLst>
+            </a:custGeom>
+            <a:solidFill>
+              <a:srgbClr val="FDFDFA"/>
+            </a:solidFill>
+            <a:ln w="9525" cap="sq">
+              <a:solidFill>
+                <a:srgbClr val="403E3E"/>
+              </a:solidFill>
+              <a:prstDash val="solid"/>
+              <a:miter/>
+            </a:ln>
+          </p:spPr>
+        </p:sp>
+        <p:sp>
+          <p:nvSpPr>
+            <p:cNvPr id="4" name="TextBox 4"/>
+            <p:cNvSpPr txBox="1"/>
+            <p:nvPr/>
+          </p:nvSpPr>
+          <p:spPr>
+            <a:xfrm>
+              <a:off x="0" y="-47625"/>
+              <a:ext cx="3845413" cy="433356"/>
+            </a:xfrm>
+            <a:prstGeom prst="rect">
+              <a:avLst/>
+            </a:prstGeom>
+          </p:spPr>
+          <p:txBody>
+            <a:bodyPr lIns="50800" tIns="50800" rIns="50800" bIns="50800" rtlCol="0" anchor="ctr"/>
+            <a:lstStyle/>
+            <a:p>
+              <a:pPr algn="ctr">
+                <a:lnSpc>
+                  <a:spcPts val="1960"/>
+                </a:lnSpc>
+              </a:pPr>
+            </a:p>
+          </p:txBody>
+        </p:sp>
+      </p:grpSp>
+      <p:sp>
+        <p:nvSpPr>
+          <p:cNvPr id="9" name="TextBox 9"/>
+          <p:cNvSpPr txBox="1"/>
+          <p:nvPr/>
+        </p:nvSpPr>
+        <p:spPr>
+          <a:xfrm>
+            <a:off x="15506330" y="8951595"/>
+            <a:ext cx="152400" cy="190500"/>
+          </a:xfrm>
+          <a:prstGeom prst="rect">
+            <a:avLst/>
+          </a:prstGeom>
+        </p:spPr>
+        <p:txBody>
+          <a:bodyPr wrap="none" lIns="0" tIns="0" rIns="0" bIns="0" rtlCol="0" anchor="t">
+            <a:spAutoFit/>
+          </a:bodyPr>
+          <a:lstStyle/>
+          <a:p>
+            <a:r>
+              <a:rPr sz="1800">
+                <a:solidFill>
+                  <a:srgbClr val="403E3E"/>
+                </a:solidFill>
+                <a:latin typeface="Inter"/>
+              </a:rPr>
+              <a:t>PAGE 6</a:t>
+            </a:r>
+          </a:p>
+        </p:txBody>
+      </p:sp>
+      <p:grpSp>
+        <p:nvGrpSpPr>
+          <p:cNvPr id="15" name="Group 15"/>
+          <p:cNvGrpSpPr/>
+          <p:nvPr/>
+        </p:nvGrpSpPr>
+        <p:grpSpPr>
+          <a:xfrm rot="5400000">
+            <a:off x="-3195310" y="2727751"/>
+            <a:ext cx="10730064" cy="4831498"/>
+            <a:chOff x="0" y="0"/>
+            <a:chExt cx="3845413" cy="1731500"/>
+          </a:xfrm>
+        </p:grpSpPr>
+        <p:sp>
+          <p:nvSpPr>
+            <p:cNvPr id="16" name="Freeform 16"/>
+            <p:cNvSpPr/>
+            <p:nvPr/>
+          </p:nvSpPr>
+          <p:spPr>
+            <a:xfrm>
+              <a:off x="0" y="0"/>
+              <a:ext cx="3845413" cy="1731500"/>
+            </a:xfrm>
+            <a:custGeom>
+              <a:avLst/>
+              <a:gdLst/>
+              <a:ahLst/>
+              <a:cxnLst/>
+              <a:rect l="l" t="t" r="r" b="b"/>
+              <a:pathLst>
+                <a:path w="3845413" h="1731500">
+                  <a:moveTo>
+                    <a:pt x="0" y="0"/>
+                  </a:moveTo>
+                  <a:lnTo>
+                    <a:pt x="3845413" y="0"/>
+                  </a:lnTo>
+                  <a:lnTo>
+                    <a:pt x="3845413" y="1731500"/>
+                  </a:lnTo>
+                  <a:lnTo>
+                    <a:pt x="0" y="1731500"/>
+                  </a:lnTo>
+                  <a:close/>
+                </a:path>
+              </a:pathLst>
+            </a:custGeom>
+            <a:solidFill>
+              <a:srgbClr val="F6F5F3"/>
+            </a:solidFill>
+            <a:ln w="9525" cap="sq">
+              <a:solidFill>
+                <a:srgbClr val="403E3E"/>
+              </a:solidFill>
+              <a:prstDash val="solid"/>
+              <a:miter/>
+            </a:ln>
+          </p:spPr>
+        </p:sp>
+        <p:sp>
+          <p:nvSpPr>
+            <p:cNvPr id="17" name="TextBox 17"/>
+            <p:cNvSpPr txBox="1"/>
+            <p:nvPr/>
+          </p:nvSpPr>
+          <p:spPr>
+            <a:xfrm>
+              <a:off x="0" y="-47625"/>
+              <a:ext cx="3845413" cy="1779125"/>
+            </a:xfrm>
+            <a:prstGeom prst="rect">
+              <a:avLst/>
+            </a:prstGeom>
+          </p:spPr>
+          <p:txBody>
+            <a:bodyPr lIns="50800" tIns="50800" rIns="50800" bIns="50800" rtlCol="0" anchor="ctr"/>
+            <a:lstStyle/>
+            <a:p>
+              <a:pPr algn="ctr">
+                <a:lnSpc>
+                  <a:spcPts val="1960"/>
+                </a:lnSpc>
+              </a:pPr>
+            </a:p>
+          </p:txBody>
+        </p:sp>
+      </p:grpSp>
+      <p:sp>
+        <p:nvSpPr>
+          <p:cNvPr id="18" name="TextBox 17"/>
+          <p:cNvSpPr txBox="1"/>
+          <p:nvPr/>
+        </p:nvSpPr>
+        <p:spPr>
+          <a:xfrm>
+            <a:off x="90525" y="1028700"/>
+            <a:ext cx="8769096" cy="1354226"/>
+          </a:xfrm>
+          <a:prstGeom prst="rect">
+            <a:avLst/>
+          </a:prstGeom>
+          <a:noFill/>
+        </p:spPr>
+        <p:txBody>
+          <a:bodyPr wrap="square">
+            <a:spAutoFit/>
+          </a:bodyPr>
+          <a:lstStyle/>
+          <a:p>
+            <a:r>
+              <a:rPr sz="4400" b="0" i="0">
+                <a:solidFill>
+                  <a:srgbClr val="403E3E"/>
+                </a:solidFill>
+                <a:latin typeface="Inter"/>
+              </a:rPr>
+              <a:t>2. Model Analyst &amp; Strategist</a:t>
+            </a:r>
+          </a:p>
+        </p:txBody>
+      </p:sp>
+      <p:sp>
+        <p:nvSpPr>
+          <p:cNvPr id="19" name="TextBox 18"/>
+          <p:cNvSpPr txBox="1"/>
+          <p:nvPr/>
+        </p:nvSpPr>
+        <p:spPr>
+          <a:xfrm>
+            <a:off x="457200" y="3161995"/>
+            <a:ext cx="3994099" cy="2708452"/>
+          </a:xfrm>
+          <a:prstGeom prst="rect">
+            <a:avLst/>
+          </a:prstGeom>
+          <a:noFill/>
+        </p:spPr>
+        <p:txBody>
+          <a:bodyPr wrap="square">
+            <a:spAutoFit/>
+          </a:bodyPr>
+          <a:lstStyle/>
+          <a:p>
+            <a:r>
+              <a:rPr sz="4400" b="0" i="0">
+                <a:solidFill>
+                  <a:srgbClr val="403E3E"/>
+                </a:solidFill>
+                <a:latin typeface="Inter"/>
+              </a:rPr>
+              <a:t>Strategi CRM Tersegmentasi</a:t>
+            </a:r>
+          </a:p>
+        </p:txBody>
+      </p:sp>
+      <p:sp>
+        <p:nvSpPr>
+          <p:cNvPr id="20" name="TextBox 19"/>
+          <p:cNvSpPr txBox="1"/>
+          <p:nvPr/>
+        </p:nvSpPr>
+        <p:spPr>
+          <a:xfrm>
+            <a:off x="5410504" y="1028700"/>
+            <a:ext cx="12401092" cy="7755940"/>
+          </a:xfrm>
+          <a:prstGeom prst="rect">
+            <a:avLst/>
+          </a:prstGeom>
+          <a:noFill/>
+        </p:spPr>
+        <p:txBody>
+          <a:bodyPr wrap="square">
+            <a:spAutoFit/>
+          </a:bodyPr>
+          <a:lstStyle/>
+          <a:p>
+            <a:pPr>
+              <a:spcAft>
+                <a:spcPts val="1200"/>
+              </a:spcAft>
+              <a:defRPr sz="2600">
+                <a:solidFill>
+                  <a:srgbClr val="403E3E"/>
+                </a:solidFill>
+                <a:latin typeface="Inter"/>
+              </a:defRPr>
+            </a:pPr>
+            <a:r>
+              <a:t>Strategi CRM Berdasarkan Segmen:</a:t>
+            </a:r>
+          </a:p>
+          <a:p>
+            <a:pPr lvl="1">
+              <a:spcAft>
+                <a:spcPts val="1200"/>
+              </a:spcAft>
+              <a:defRPr sz="2200">
+                <a:solidFill>
+                  <a:srgbClr val="403E3E"/>
+                </a:solidFill>
+                <a:latin typeface="Inter"/>
+              </a:defRPr>
+            </a:pPr>
+            <a:r>
+              <a:t>- Loyal High-Spenders: Akses VIP, poin loyalitas khusus, penawaran produk eksklusif.</a:t>
+            </a:r>
+          </a:p>
+          <a:p>
+            <a:pPr lvl="1">
+              <a:spcAft>
+                <a:spcPts val="1200"/>
+              </a:spcAft>
+              <a:defRPr sz="2200">
+                <a:solidFill>
+                  <a:srgbClr val="403E3E"/>
+                </a:solidFill>
+                <a:latin typeface="Inter"/>
+              </a:defRPr>
+            </a:pPr>
+            <a:r>
+              <a:t>- At-Risk High-Spenders: Kampanye win-back email pribadi dengan voucher diskon bernilai besar.</a:t>
+            </a:r>
+          </a:p>
+          <a:p>
+            <a:pPr lvl="1">
+              <a:spcAft>
+                <a:spcPts val="1200"/>
+              </a:spcAft>
+              <a:defRPr sz="2200">
+                <a:solidFill>
+                  <a:srgbClr val="403E3E"/>
+                </a:solidFill>
+                <a:latin typeface="Inter"/>
+              </a:defRPr>
+            </a:pPr>
+            <a:r>
+              <a:t>- New Shoppers: Kupon potongan harga untuk pembelian kedua guna mendorong retensi berkelanjutan.</a:t>
+            </a:r>
+          </a:p>
+          <a:p>
+            <a:pPr lvl="1">
+              <a:spcAft>
+                <a:spcPts val="1200"/>
+              </a:spcAft>
+              <a:defRPr sz="2200">
+                <a:solidFill>
+                  <a:srgbClr val="403E3E"/>
+                </a:solidFill>
+                <a:latin typeface="Inter"/>
+              </a:defRPr>
+            </a:pPr>
+            <a:r>
+              <a:t>- Lost Customers: Email pengingat otomatis dengan produk terlaris bertarif rendah.</a:t>
+            </a:r>
+          </a:p>
+        </p:txBody>
+      </p:sp>
+    </p:spTree>
+  </p:cSld>
+  <p:clrMapOvr>
+    <a:masterClrMapping/>
+  </p:clrMapOvr>
+</p:sld>
+</file>
+
+<file path=ppt/slides/slide7.xml><?xml version="1.0" encoding="utf-8"?>
 <p:sld xmlns:a="http://schemas.openxmlformats.org/drawingml/2006/main" xmlns:r="http://schemas.openxmlformats.org/officeDocument/2006/relationships" xmlns:p="http://schemas.openxmlformats.org/presentationml/2006/main">
   <p:cSld>
     <p:bg>
